--- a/Planning docs/Slides/lesson-3-4-teacher-slides.pptx
+++ b/Planning docs/Slides/lesson-3-4-teacher-slides.pptx
@@ -3813,7 +3813,7 @@
                 <a:ea typeface="Calibri" pitchFamily="34" charset="-122"/>
                 <a:cs typeface="Calibri" pitchFamily="34" charset="-120"/>
               </a:rPr>
-              <a:t>•  Think about Stanley at the beginning vs. the end. What is the most important thing that happened in this whole book?</a:t>
+              <a:t>•  Stop after Arthur digs the old bicycle pump out of the storage box. Arthur has been jealous of Stanley since Chapter 2. What changed him into the brother who fixes things?</a:t>
             </a:r>
             <a:endParaRPr lang="en-US" sz="1500" dirty="0"/>
           </a:p>
@@ -5289,7 +5289,7 @@
                 <a:ea typeface="Calibri" pitchFamily="34" charset="-122"/>
                 <a:cs typeface="Calibri" pitchFamily="34" charset="-120"/>
               </a:rPr>
-              <a:t>Think about Stanley at the beginning vs. the end. What is the most important thing that happened in this whole book?</a:t>
+              <a:t>Stop after Arthur digs the old bicycle pump out of the storage box. Arthur has been jealous of Stanley since Chapter 2. What changed him into the brother who fixes things?</a:t>
             </a:r>
             <a:endParaRPr lang="en-US" sz="1700" dirty="0"/>
           </a:p>
